--- a/Zero_Food_Waste (1).pptx
+++ b/Zero_Food_Waste (1).pptx
@@ -4,6 +4,9 @@
   <p:sldMasterIdLst>
     <p:sldMasterId id="2147483648" r:id="rId1"/>
   </p:sldMasterIdLst>
+  <p:notesMasterIdLst>
+    <p:notesMasterId r:id="rId7"/>
+  </p:notesMasterIdLst>
   <p:sldIdLst>
     <p:sldId id="256" r:id="rId2"/>
     <p:sldId id="257" r:id="rId3"/>
@@ -11,10 +14,7 @@
     <p:sldId id="259" r:id="rId5"/>
     <p:sldId id="260" r:id="rId6"/>
   </p:sldIdLst>
-  <p:notesMasterIdLst>
-    <p:notesMasterId r:id="rId7"/>
-  </p:notesMasterIdLst>
-  <p:sldSz cx="9144000" cy="5143500"/>
+  <p:sldSz cx="9144000" cy="5143500" type="screen16x9"/>
   <p:notesSz cx="5143500" cy="9144000"/>
   <p:defaultTextStyle>
     <a:lvl1pPr marL="0" algn="l" defTabSz="914400" rtl="0" eaLnBrk="1" latinLnBrk="0" hangingPunct="1">
@@ -108,6 +108,11 @@
       </a:defRPr>
     </a:lvl9pPr>
   </p:defaultTextStyle>
+  <p:extLst>
+    <p:ext uri="{EFAFB233-063F-42B5-8137-9DF3F51BA10A}">
+      <p15:sldGuideLst xmlns:p15="http://schemas.microsoft.com/office/powerpoint/2012/main"/>
+    </p:ext>
+  </p:extLst>
 </p:presentation>
 </file>
 
@@ -133,234 +138,10 @@
           <a:chExt cx="0" cy="0"/>
         </a:xfrm>
       </p:grpSpPr>
-      <p:sp>
-        <p:nvSpPr>
-          <p:cNvPr id="2" name="Header Placeholder 1"/>
-          <p:cNvSpPr>
-            <a:spLocks noGrp="1"/>
-          </p:cNvSpPr>
-          <p:nvPr>
-            <p:ph type="hdr" sz="quarter"/>
-          </p:nvPr>
-        </p:nvSpPr>
-        <p:spPr>
-          <a:xfrm>
-            <a:off x="0" y="0"/>
-            <a:ext cx="2971800" cy="458788"/>
-          </a:xfrm>
-          <a:prstGeom prst="rect">
-            <a:avLst/>
-          </a:prstGeom>
-        </p:spPr>
-        <p:txBody>
-          <a:bodyPr vert="horz" lIns="91440" tIns="45720" rIns="91440" bIns="45720" rtlCol="0"/>
-          <a:lstStyle>
-            <a:lvl1pPr algn="l">
-              <a:defRPr sz="1200"/>
-            </a:lvl1pPr>
-          </a:lstStyle>
-          <a:p>
-            <a:endParaRPr lang="en-US"/>
-          </a:p>
-        </p:txBody>
-      </p:sp>
-      <p:sp>
-        <p:nvSpPr>
-          <p:cNvPr id="3" name="Date Placeholder 2"/>
-          <p:cNvSpPr>
-            <a:spLocks noGrp="1"/>
-          </p:cNvSpPr>
-          <p:nvPr>
-            <p:ph type="dt" idx="1"/>
-          </p:nvPr>
-        </p:nvSpPr>
-        <p:spPr>
-          <a:xfrm>
-            <a:off x="3884613" y="0"/>
-            <a:ext cx="2971800" cy="458788"/>
-          </a:xfrm>
-          <a:prstGeom prst="rect">
-            <a:avLst/>
-          </a:prstGeom>
-        </p:spPr>
-        <p:txBody>
-          <a:bodyPr vert="horz" lIns="91440" tIns="45720" rIns="91440" bIns="45720" rtlCol="0"/>
-          <a:lstStyle>
-            <a:lvl1pPr algn="r">
-              <a:defRPr sz="1200"/>
-            </a:lvl1pPr>
-          </a:lstStyle>
-          <a:p>
-            <a:fld id="{5282F153-3F37-0F45-9E97-73ACFA13230C}" type="datetimeFigureOut">
-              <a:rPr lang="en-US"/>
-              <a:t>7/23/19</a:t>
-            </a:fld>
-            <a:endParaRPr lang="en-US"/>
-          </a:p>
-        </p:txBody>
-      </p:sp>
-      <p:sp>
-        <p:nvSpPr>
-          <p:cNvPr id="4" name="Slide Image Placeholder 3"/>
-          <p:cNvSpPr>
-            <a:spLocks noGrp="1" noRot="1" noChangeAspect="1"/>
-          </p:cNvSpPr>
-          <p:nvPr>
-            <p:ph type="sldImg" idx="2"/>
-          </p:nvPr>
-        </p:nvSpPr>
-        <p:spPr>
-          <a:xfrm>
-            <a:off x="685800" y="1143000"/>
-            <a:ext cx="5486400" cy="3086100"/>
-          </a:xfrm>
-          <a:prstGeom prst="rect">
-            <a:avLst/>
-          </a:prstGeom>
-          <a:noFill/>
-          <a:ln w="12700">
-            <a:solidFill>
-              <a:prstClr val="black"/>
-            </a:solidFill>
-          </a:ln>
-        </p:spPr>
-        <p:txBody>
-          <a:bodyPr vert="horz" lIns="91440" tIns="45720" rIns="91440" bIns="45720" rtlCol="0" anchor="ctr"/>
-          <a:lstStyle/>
-          <a:p>
-            <a:endParaRPr lang="en-US"/>
-          </a:p>
-        </p:txBody>
-      </p:sp>
-      <p:sp>
-        <p:nvSpPr>
-          <p:cNvPr id="5" name="Notes Placeholder 4"/>
-          <p:cNvSpPr>
-            <a:spLocks noGrp="1"/>
-          </p:cNvSpPr>
-          <p:nvPr>
-            <p:ph type="body" sz="quarter" idx="3"/>
-          </p:nvPr>
-        </p:nvSpPr>
-        <p:spPr>
-          <a:xfrm>
-            <a:off x="685800" y="4400550"/>
-            <a:ext cx="5486400" cy="3600450"/>
-          </a:xfrm>
-          <a:prstGeom prst="rect">
-            <a:avLst/>
-          </a:prstGeom>
-        </p:spPr>
-        <p:txBody>
-          <a:bodyPr vert="horz" lIns="91440" tIns="45720" rIns="91440" bIns="45720" rtlCol="0"/>
-          <a:lstStyle/>
-          <a:p>
-            <a:pPr lvl="0"/>
-            <a:r>
-              <a:rPr lang="en-US"/>
-              <a:t>Click to edit Master text styles</a:t>
-            </a:r>
-          </a:p>
-          <a:p>
-            <a:pPr lvl="1"/>
-            <a:r>
-              <a:rPr lang="en-US"/>
-              <a:t>Second level</a:t>
-            </a:r>
-          </a:p>
-          <a:p>
-            <a:pPr lvl="2"/>
-            <a:r>
-              <a:rPr lang="en-US"/>
-              <a:t>Third level</a:t>
-            </a:r>
-          </a:p>
-          <a:p>
-            <a:pPr lvl="3"/>
-            <a:r>
-              <a:rPr lang="en-US"/>
-              <a:t>Fourth level</a:t>
-            </a:r>
-          </a:p>
-          <a:p>
-            <a:pPr lvl="4"/>
-            <a:r>
-              <a:rPr lang="en-US"/>
-              <a:t>Fifth level</a:t>
-            </a:r>
-          </a:p>
-        </p:txBody>
-      </p:sp>
-      <p:sp>
-        <p:nvSpPr>
-          <p:cNvPr id="6" name="Footer Placeholder 5"/>
-          <p:cNvSpPr>
-            <a:spLocks noGrp="1"/>
-          </p:cNvSpPr>
-          <p:nvPr>
-            <p:ph type="ftr" sz="quarter" idx="4"/>
-          </p:nvPr>
-        </p:nvSpPr>
-        <p:spPr>
-          <a:xfrm>
-            <a:off x="0" y="8685213"/>
-            <a:ext cx="2971800" cy="458787"/>
-          </a:xfrm>
-          <a:prstGeom prst="rect">
-            <a:avLst/>
-          </a:prstGeom>
-        </p:spPr>
-        <p:txBody>
-          <a:bodyPr vert="horz" lIns="91440" tIns="45720" rIns="91440" bIns="45720" rtlCol="0" anchor="b"/>
-          <a:lstStyle>
-            <a:lvl1pPr algn="l">
-              <a:defRPr sz="1200"/>
-            </a:lvl1pPr>
-          </a:lstStyle>
-          <a:p>
-            <a:endParaRPr lang="en-US"/>
-          </a:p>
-        </p:txBody>
-      </p:sp>
-      <p:sp>
-        <p:nvSpPr>
-          <p:cNvPr id="7" name="Slide Number Placeholder 6"/>
-          <p:cNvSpPr>
-            <a:spLocks noGrp="1"/>
-          </p:cNvSpPr>
-          <p:nvPr>
-            <p:ph type="sldNum" sz="quarter" idx="5"/>
-          </p:nvPr>
-        </p:nvSpPr>
-        <p:spPr>
-          <a:xfrm>
-            <a:off x="3884613" y="8685213"/>
-            <a:ext cx="2971800" cy="458787"/>
-          </a:xfrm>
-          <a:prstGeom prst="rect">
-            <a:avLst/>
-          </a:prstGeom>
-        </p:spPr>
-        <p:txBody>
-          <a:bodyPr vert="horz" lIns="91440" tIns="45720" rIns="91440" bIns="45720" rtlCol="0" anchor="b"/>
-          <a:lstStyle>
-            <a:lvl1pPr algn="r">
-              <a:defRPr sz="1200"/>
-            </a:lvl1pPr>
-          </a:lstStyle>
-          <a:p>
-            <a:fld id="{CE5E9CC1-C706-0F49-92D6-E571CC5EEA8F}" type="slidenum">
-              <a:rPr lang="en-US"/>
-              <a:t>‹#›</a:t>
-            </a:fld>
-            <a:endParaRPr lang="en-US"/>
-          </a:p>
-        </p:txBody>
-      </p:sp>
     </p:spTree>
     <p:extLst>
       <p:ext uri="{BB962C8B-B14F-4D97-AF65-F5344CB8AC3E}">
-        <p14:creationId xmlns:p14="http://schemas.microsoft.com/office/powerpoint/2010/main" val="1024086991"/>
+        <p14:creationId xmlns:p14="http://schemas.microsoft.com/office/powerpoint/2010/main" val="3927670162"/>
       </p:ext>
     </p:extLst>
   </p:cSld>
@@ -508,7 +289,6 @@
               <a:rPr lang="en-US" dirty="0"/>
               <a:t>Open on the clock. Cooked food has about four hours. Surplus and hunger sit kilometres apart but nobody connects them in time. The 78M figure is from the UNEP Food Waste Index 2024 (household food waste, India); verify before presenting.</a:t>
             </a:r>
-            <a:endParaRPr lang="en-US" dirty="0"/>
           </a:p>
         </p:txBody>
       </p:sp>
@@ -596,7 +376,6 @@
               <a:rPr lang="en-US" dirty="0"/>
               <a:t>Walk left to right along the conveyor. The orchestrator skill chains six skills. The safety skill can stop the whole chain with a REJECT. Matching, routing and impact math are Python scripts, so results are consistent and explainable. Data files at the bottom feed the skills; outputs are the dashboard, messages and ledger.</a:t>
             </a:r>
-            <a:endParaRPr lang="en-US" dirty="0"/>
           </a:p>
         </p:txBody>
       </p:sp>
@@ -684,7 +463,6 @@
               <a:rPr lang="en-US" dirty="0"/>
               <a:t>The prototype runs offline on Python 3 and a static web page, so the demo cannot fail on Wi-Fi. The amber card is the production path: real messaging, a geospatial database and road routing.</a:t>
             </a:r>
-            <a:endParaRPr lang="en-US" dirty="0"/>
           </a:p>
         </p:txBody>
       </p:sp>
@@ -772,7 +550,6 @@
               <a:rPr lang="en-US" dirty="0"/>
               <a:t>Lead with the safety gate: most food-sharing apps are listing boards, ours refuses unsafe food. The numbers are projections from documented assumptions: 0.4 kg per packet and 2.5 kg CO2e per kg of food waste avoided. Say they are projections.</a:t>
             </a:r>
-            <a:endParaRPr lang="en-US" dirty="0"/>
           </a:p>
         </p:txBody>
       </p:sp>
@@ -860,7 +637,6 @@
               <a:rPr lang="en-US" dirty="0"/>
               <a:t>Replace the placeholder with dashboard screenshots or a short screen recording. Suggested demo: paste the wedding-hall listing, show the safety verdict, the match and route, the three messages, then the impact counter. End with the rejected listing.</a:t>
             </a:r>
-            <a:endParaRPr lang="en-US" dirty="0"/>
           </a:p>
         </p:txBody>
       </p:sp>
@@ -938,6 +714,7 @@
         <a:solidFill>
           <a:srgbClr val="0E241A"/>
         </a:solidFill>
+        <a:effectLst/>
       </p:bgPr>
     </p:bg>
     <p:spTree>
@@ -975,11 +752,11 @@
           <a:bodyPr wrap="square" lIns="0" tIns="0" rIns="0" bIns="0" rtlCol="0" anchor="ctr"/>
           <a:lstStyle/>
           <a:p>
-            <a:pPr indent="0" marL="0">
+            <a:pPr marL="0" indent="0">
               <a:buNone/>
             </a:pPr>
             <a:r>
-              <a:rPr lang="en-US" sz="900" b="1" spc="300" kern="0" dirty="0">
+              <a:rPr lang="en-US" sz="900" b="1" kern="0" spc="300" dirty="0">
                 <a:solidFill>
                   <a:srgbClr val="8FA79A"/>
                 </a:solidFill>
@@ -993,9 +770,11 @@
       <p:sp>
         <p:nvSpPr>
           <p:cNvPr id="3" name="Text 1"/>
-          <p:cNvSpPr/>
+          <p:cNvSpPr>
+            <a:spLocks noGrp="1"/>
+          </p:cNvSpPr>
           <p:nvPr>
-            <p:ph idx="101" type="title" hasCustomPrompt="1"/>
+            <p:ph type="title" idx="101" hasCustomPrompt="1"/>
           </p:nvPr>
         </p:nvSpPr>
         <p:spPr>
@@ -1012,7 +791,7 @@
         <p:txBody>
           <a:bodyPr wrap="square" rtlCol="0"/>
           <a:lstStyle>
-            <a:lvl1pPr algn="l" indent="0" marL="0">
+            <a:lvl1pPr marL="0" indent="0" algn="l">
               <a:buNone/>
               <a:defRPr lang="en-US" sz="2600" b="1" dirty="0">
                 <a:solidFill>
@@ -1022,7 +801,7 @@
             </a:lvl1pPr>
           </a:lstStyle>
           <a:p>
-            <a:pPr algn="l" indent="0" marL="0">
+            <a:pPr marL="0" indent="0" algn="l">
               <a:buNone/>
             </a:pPr>
             <a:endParaRPr lang="en-US" sz="2600" dirty="0"/>
@@ -1049,7 +828,7 @@
           </a:prstGeom>
           <a:extLst>
             <a:ext uri="{C572A759-6A51-4108-AA02-DFA0A04FC94B}">
-              <ma14:wrappingTextBoxFlag xmlns:ma14="http://schemas.microsoft.com/office/mac/drawingml/2011/main" val="0"/>
+              <ma14:wrappingTextBoxFlag xmlns:ma14="http://schemas.microsoft.com/office/mac/drawingml/2011/main" xmlns="" val="0"/>
             </a:ext>
           </a:extLst>
         </p:spPr>
@@ -1067,8 +846,8 @@
           <a:p>
             <a:pPr algn="r"/>
             <a:fld id="{F7021451-1387-4CA6-816F-3879F97B5CBC}" type="slidenum">
-              <a:rPr b="0" lang="en-US"/>
-              <a:t>1002</a:t>
+              <a:rPr lang="en-US" b="0"/>
+              <a:t>‹#›</a:t>
             </a:fld>
             <a:endParaRPr lang="en-US"/>
           </a:p>
@@ -1085,6 +864,11 @@
 <file path=ppt/slideMasters/slideMaster1.xml><?xml version="1.0" encoding="utf-8"?>
 <p:sldMaster xmlns:a="http://schemas.openxmlformats.org/drawingml/2006/main" xmlns:r="http://schemas.openxmlformats.org/officeDocument/2006/relationships" xmlns:p="http://schemas.openxmlformats.org/presentationml/2006/main">
   <p:cSld>
+    <p:bg>
+      <p:bgRef idx="1001">
+        <a:schemeClr val="bg1"/>
+      </p:bgRef>
+    </p:bg>
     <p:spTree>
       <p:nvGrpSpPr>
         <p:cNvPr id="1" name=""/>
@@ -1119,7 +903,7 @@
           </a:prstGeom>
           <a:extLst>
             <a:ext uri="{C572A759-6A51-4108-AA02-DFA0A04FC94B}">
-              <ma14:wrappingTextBoxFlag xmlns:ma14="http://schemas.microsoft.com/office/mac/drawingml/2011/main" val="0"/>
+              <ma14:wrappingTextBoxFlag xmlns:ma14="http://schemas.microsoft.com/office/mac/drawingml/2011/main" xmlns="" val="0"/>
             </a:ext>
           </a:extLst>
         </p:spPr>
@@ -1137,8 +921,8 @@
           <a:p>
             <a:pPr algn="r"/>
             <a:fld id="{F7021451-1387-4CA6-816F-3879F97B5CBC}" type="slidenum">
-              <a:rPr b="0" lang="en-US"/>
-              <a:t>null</a:t>
+              <a:rPr lang="en-US" b="0"/>
+              <a:t>‹#›</a:t>
             </a:fld>
             <a:endParaRPr lang="en-US"/>
           </a:p>
@@ -1425,9 +1209,11 @@
       <p:sp>
         <p:nvSpPr>
           <p:cNvPr id="2" name="Text 1"/>
-          <p:cNvSpPr/>
+          <p:cNvSpPr>
+            <a:spLocks noGrp="1"/>
+          </p:cNvSpPr>
           <p:nvPr>
-            <p:ph idx="101" type="title" hasCustomPrompt="1"/>
+            <p:ph type="title" idx="101" hasCustomPrompt="1"/>
           </p:nvPr>
         </p:nvSpPr>
         <p:spPr>
@@ -1445,7 +1231,7 @@
           <a:bodyPr wrap="square" lIns="0" tIns="0" rIns="0" bIns="0" rtlCol="0" anchor="ctr"/>
           <a:lstStyle/>
           <a:p>
-            <a:pPr algn="l" indent="0" marL="0">
+            <a:pPr marL="0" indent="0" algn="l">
               <a:buNone/>
             </a:pPr>
             <a:r>
@@ -1531,11 +1317,11 @@
           <a:bodyPr wrap="square" lIns="0" tIns="0" rIns="0" bIns="0" rtlCol="0" anchor="ctr"/>
           <a:lstStyle/>
           <a:p>
-            <a:pPr algn="r" indent="0" marL="0">
+            <a:pPr marL="0" indent="0" algn="r">
               <a:buNone/>
             </a:pPr>
             <a:r>
-              <a:rPr lang="en-US" sz="900" b="1" spc="100" kern="0" dirty="0">
+              <a:rPr lang="en-US" sz="900" b="1" kern="0" spc="100" dirty="0">
                 <a:solidFill>
                   <a:schemeClr val="accent1"/>
                 </a:solidFill>
@@ -1567,7 +1353,7 @@
           <a:bodyPr wrap="square" lIns="0" tIns="0" rIns="0" bIns="0" rtlCol="0" anchor="ctr"/>
           <a:lstStyle/>
           <a:p>
-            <a:pPr indent="0" marL="0">
+            <a:pPr marL="0" indent="0">
               <a:buNone/>
             </a:pPr>
             <a:r>
@@ -1606,7 +1392,7 @@
           <a:bodyPr wrap="square" lIns="0" tIns="0" rIns="0" bIns="0" rtlCol="0" anchor="ctr"/>
           <a:lstStyle/>
           <a:p>
-            <a:pPr indent="0" marL="0">
+            <a:pPr marL="0" indent="0">
               <a:buNone/>
             </a:pPr>
             <a:r>
@@ -1667,7 +1453,7 @@
           <a:bodyPr wrap="square" lIns="0" tIns="0" rIns="0" bIns="0" rtlCol="0" anchor="ctr"/>
           <a:lstStyle/>
           <a:p>
-            <a:pPr algn="ctr" indent="0" marL="0">
+            <a:pPr marL="0" indent="0" algn="ctr">
               <a:buNone/>
             </a:pPr>
             <a:r>
@@ -1703,7 +1489,7 @@
           <a:bodyPr wrap="square" lIns="0" tIns="0" rIns="0" bIns="0" rtlCol="0" anchor="t"/>
           <a:lstStyle/>
           <a:p>
-            <a:pPr indent="0" marL="0">
+            <a:pPr marL="0" indent="0">
               <a:buNone/>
             </a:pPr>
             <a:r>
@@ -1717,7 +1503,7 @@
             <a:endParaRPr lang="en-US" sz="1300" dirty="0"/>
           </a:p>
           <a:p>
-            <a:pPr indent="0" marL="0">
+            <a:pPr marL="0" indent="0">
               <a:buNone/>
             </a:pPr>
             <a:r>
@@ -1778,7 +1564,7 @@
           <a:bodyPr wrap="square" lIns="0" tIns="0" rIns="0" bIns="0" rtlCol="0" anchor="ctr"/>
           <a:lstStyle/>
           <a:p>
-            <a:pPr algn="ctr" indent="0" marL="0">
+            <a:pPr marL="0" indent="0" algn="ctr">
               <a:buNone/>
             </a:pPr>
             <a:r>
@@ -1814,7 +1600,7 @@
           <a:bodyPr wrap="square" lIns="0" tIns="0" rIns="0" bIns="0" rtlCol="0" anchor="t"/>
           <a:lstStyle/>
           <a:p>
-            <a:pPr indent="0" marL="0">
+            <a:pPr marL="0" indent="0">
               <a:buNone/>
             </a:pPr>
             <a:r>
@@ -1828,7 +1614,7 @@
             <a:endParaRPr lang="en-US" sz="1300" dirty="0"/>
           </a:p>
           <a:p>
-            <a:pPr indent="0" marL="0">
+            <a:pPr marL="0" indent="0">
               <a:buNone/>
             </a:pPr>
             <a:r>
@@ -1889,7 +1675,7 @@
           <a:bodyPr wrap="square" lIns="0" tIns="0" rIns="0" bIns="0" rtlCol="0" anchor="ctr"/>
           <a:lstStyle/>
           <a:p>
-            <a:pPr algn="ctr" indent="0" marL="0">
+            <a:pPr marL="0" indent="0" algn="ctr">
               <a:buNone/>
             </a:pPr>
             <a:r>
@@ -1925,7 +1711,7 @@
           <a:bodyPr wrap="square" lIns="0" tIns="0" rIns="0" bIns="0" rtlCol="0" anchor="t"/>
           <a:lstStyle/>
           <a:p>
-            <a:pPr indent="0" marL="0">
+            <a:pPr marL="0" indent="0">
               <a:buNone/>
             </a:pPr>
             <a:r>
@@ -1939,7 +1725,7 @@
             <a:endParaRPr lang="en-US" sz="1300" dirty="0"/>
           </a:p>
           <a:p>
-            <a:pPr indent="0" marL="0">
+            <a:pPr marL="0" indent="0">
               <a:buNone/>
             </a:pPr>
             <a:r>
@@ -2002,7 +1788,7 @@
           <a:bodyPr wrap="square" lIns="0" tIns="0" rIns="0" bIns="0" rtlCol="0" anchor="ctr"/>
           <a:lstStyle/>
           <a:p>
-            <a:pPr indent="0" marL="0">
+            <a:pPr marL="0" indent="0">
               <a:buNone/>
             </a:pPr>
             <a:r>
@@ -2041,7 +1827,7 @@
           <a:bodyPr wrap="square" lIns="0" tIns="0" rIns="0" bIns="0" rtlCol="0" anchor="ctr"/>
           <a:lstStyle/>
           <a:p>
-            <a:pPr indent="0" marL="0">
+            <a:pPr marL="0" indent="0">
               <a:buNone/>
             </a:pPr>
             <a:r>
@@ -2077,7 +1863,7 @@
           <a:bodyPr wrap="square" lIns="0" tIns="0" rIns="0" bIns="0" rtlCol="0" anchor="ctr"/>
           <a:lstStyle/>
           <a:p>
-            <a:pPr indent="0" marL="0">
+            <a:pPr marL="0" indent="0">
               <a:buNone/>
             </a:pPr>
             <a:r>
@@ -2136,7 +1922,7 @@
           <a:bodyPr wrap="square" lIns="0" tIns="0" rIns="0" bIns="0" rtlCol="0" anchor="ctr"/>
           <a:lstStyle/>
           <a:p>
-            <a:pPr indent="0" marL="0">
+            <a:pPr marL="0" indent="0">
               <a:buNone/>
             </a:pPr>
             <a:r>
@@ -2171,7 +1957,7 @@
           </a:prstGeom>
           <a:extLst>
             <a:ext uri="{C572A759-6A51-4108-AA02-DFA0A04FC94B}">
-              <ma14:wrappingTextBoxFlag xmlns:ma14="http://schemas.microsoft.com/office/mac/drawingml/2011/main" val="0"/>
+              <ma14:wrappingTextBoxFlag xmlns:ma14="http://schemas.microsoft.com/office/mac/drawingml/2011/main" xmlns="" val="0"/>
             </a:ext>
           </a:extLst>
         </p:spPr>
@@ -2189,7 +1975,7 @@
           <a:p>
             <a:pPr algn="r"/>
             <a:fld id="{F7021451-1387-4CA6-816F-3879F97B5CBC}" type="slidenum">
-              <a:rPr b="0" lang="en-US"/>
+              <a:rPr lang="en-US" b="0"/>
               <a:t>1</a:t>
             </a:fld>
             <a:endParaRPr lang="en-US"/>
@@ -2908,9 +2694,11 @@
       <p:sp>
         <p:nvSpPr>
           <p:cNvPr id="2" name="Text 1"/>
-          <p:cNvSpPr/>
+          <p:cNvSpPr>
+            <a:spLocks noGrp="1"/>
+          </p:cNvSpPr>
           <p:nvPr>
-            <p:ph idx="101" type="title" hasCustomPrompt="1"/>
+            <p:ph type="title" idx="101" hasCustomPrompt="1"/>
           </p:nvPr>
         </p:nvSpPr>
         <p:spPr>
@@ -2928,7 +2716,7 @@
           <a:bodyPr wrap="square" lIns="0" tIns="0" rIns="0" bIns="0" rtlCol="0" anchor="ctr"/>
           <a:lstStyle/>
           <a:p>
-            <a:pPr algn="l" indent="0" marL="0">
+            <a:pPr marL="0" indent="0" algn="l">
               <a:buNone/>
             </a:pPr>
             <a:r>
@@ -3014,11 +2802,11 @@
           <a:bodyPr wrap="square" lIns="0" tIns="0" rIns="0" bIns="0" rtlCol="0" anchor="ctr"/>
           <a:lstStyle/>
           <a:p>
-            <a:pPr algn="r" indent="0" marL="0">
+            <a:pPr marL="0" indent="0" algn="r">
               <a:buNone/>
             </a:pPr>
             <a:r>
-              <a:rPr lang="en-US" sz="900" b="1" spc="100" kern="0" dirty="0">
+              <a:rPr lang="en-US" sz="900" b="1" kern="0" spc="100" dirty="0">
                 <a:solidFill>
                   <a:schemeClr val="accent1"/>
                 </a:solidFill>
@@ -3077,7 +2865,7 @@
           <a:bodyPr wrap="square" lIns="0" tIns="0" rIns="0" bIns="0" rtlCol="0" anchor="ctr"/>
           <a:lstStyle/>
           <a:p>
-            <a:pPr algn="ctr" indent="0" marL="0">
+            <a:pPr marL="0" indent="0" algn="ctr">
               <a:buNone/>
             </a:pPr>
             <a:r>
@@ -3113,7 +2901,7 @@
           <a:bodyPr wrap="square" lIns="0" tIns="0" rIns="0" bIns="0" rtlCol="0" anchor="ctr"/>
           <a:lstStyle/>
           <a:p>
-            <a:pPr algn="ctr" indent="0" marL="0">
+            <a:pPr marL="0" indent="0" algn="ctr">
               <a:buNone/>
             </a:pPr>
             <a:r>
@@ -3197,7 +2985,7 @@
           <a:bodyPr wrap="square" lIns="0" tIns="0" rIns="0" bIns="0" rtlCol="0" anchor="ctr"/>
           <a:lstStyle/>
           <a:p>
-            <a:pPr algn="ctr" indent="0" marL="0">
+            <a:pPr marL="0" indent="0" algn="ctr">
               <a:buNone/>
             </a:pPr>
             <a:r>
@@ -3233,7 +3021,7 @@
           <a:bodyPr wrap="square" lIns="0" tIns="0" rIns="0" bIns="0" rtlCol="0" anchor="t"/>
           <a:lstStyle/>
           <a:p>
-            <a:pPr algn="ctr" indent="0" marL="0">
+            <a:pPr marL="0" indent="0" algn="ctr">
               <a:buNone/>
             </a:pPr>
             <a:r>
@@ -3247,7 +3035,7 @@
             <a:endParaRPr lang="en-US" sz="1200" dirty="0"/>
           </a:p>
           <a:p>
-            <a:pPr algn="ctr" indent="0" marL="0">
+            <a:pPr marL="0" indent="0" algn="ctr">
               <a:buNone/>
             </a:pPr>
             <a:r>
@@ -3308,7 +3096,7 @@
           <a:bodyPr wrap="square" lIns="0" tIns="0" rIns="0" bIns="0" rtlCol="0" anchor="ctr"/>
           <a:lstStyle/>
           <a:p>
-            <a:pPr algn="ctr" indent="0" marL="0">
+            <a:pPr marL="0" indent="0" algn="ctr">
               <a:buNone/>
             </a:pPr>
             <a:r>
@@ -3344,7 +3132,7 @@
           <a:bodyPr wrap="square" lIns="0" tIns="0" rIns="0" bIns="0" rtlCol="0" anchor="t"/>
           <a:lstStyle/>
           <a:p>
-            <a:pPr algn="ctr" indent="0" marL="0">
+            <a:pPr marL="0" indent="0" algn="ctr">
               <a:buNone/>
             </a:pPr>
             <a:r>
@@ -3358,7 +3146,7 @@
             <a:endParaRPr lang="en-US" sz="1200" dirty="0"/>
           </a:p>
           <a:p>
-            <a:pPr algn="ctr" indent="0" marL="0">
+            <a:pPr marL="0" indent="0" algn="ctr">
               <a:buNone/>
             </a:pPr>
             <a:r>
@@ -3419,7 +3207,7 @@
           <a:bodyPr wrap="square" lIns="0" tIns="0" rIns="0" bIns="0" rtlCol="0" anchor="ctr"/>
           <a:lstStyle/>
           <a:p>
-            <a:pPr algn="ctr" indent="0" marL="0">
+            <a:pPr marL="0" indent="0" algn="ctr">
               <a:buNone/>
             </a:pPr>
             <a:r>
@@ -3455,7 +3243,7 @@
           <a:bodyPr wrap="square" lIns="0" tIns="0" rIns="0" bIns="0" rtlCol="0" anchor="t"/>
           <a:lstStyle/>
           <a:p>
-            <a:pPr algn="ctr" indent="0" marL="0">
+            <a:pPr marL="0" indent="0" algn="ctr">
               <a:buNone/>
             </a:pPr>
             <a:r>
@@ -3469,7 +3257,7 @@
             <a:endParaRPr lang="en-US" sz="1200" dirty="0"/>
           </a:p>
           <a:p>
-            <a:pPr algn="ctr" indent="0" marL="0">
+            <a:pPr marL="0" indent="0" algn="ctr">
               <a:buNone/>
             </a:pPr>
             <a:r>
@@ -3530,7 +3318,7 @@
           <a:bodyPr wrap="square" lIns="0" tIns="0" rIns="0" bIns="0" rtlCol="0" anchor="ctr"/>
           <a:lstStyle/>
           <a:p>
-            <a:pPr algn="ctr" indent="0" marL="0">
+            <a:pPr marL="0" indent="0" algn="ctr">
               <a:buNone/>
             </a:pPr>
             <a:r>
@@ -3566,7 +3354,7 @@
           <a:bodyPr wrap="square" lIns="0" tIns="0" rIns="0" bIns="0" rtlCol="0" anchor="t"/>
           <a:lstStyle/>
           <a:p>
-            <a:pPr algn="ctr" indent="0" marL="0">
+            <a:pPr marL="0" indent="0" algn="ctr">
               <a:buNone/>
             </a:pPr>
             <a:r>
@@ -3580,7 +3368,7 @@
             <a:endParaRPr lang="en-US" sz="1200" dirty="0"/>
           </a:p>
           <a:p>
-            <a:pPr algn="ctr" indent="0" marL="0">
+            <a:pPr marL="0" indent="0" algn="ctr">
               <a:buNone/>
             </a:pPr>
             <a:r>
@@ -3641,7 +3429,7 @@
           <a:bodyPr wrap="square" lIns="0" tIns="0" rIns="0" bIns="0" rtlCol="0" anchor="ctr"/>
           <a:lstStyle/>
           <a:p>
-            <a:pPr algn="ctr" indent="0" marL="0">
+            <a:pPr marL="0" indent="0" algn="ctr">
               <a:buNone/>
             </a:pPr>
             <a:r>
@@ -3677,7 +3465,7 @@
           <a:bodyPr wrap="square" lIns="0" tIns="0" rIns="0" bIns="0" rtlCol="0" anchor="t"/>
           <a:lstStyle/>
           <a:p>
-            <a:pPr algn="ctr" indent="0" marL="0">
+            <a:pPr marL="0" indent="0" algn="ctr">
               <a:buNone/>
             </a:pPr>
             <a:r>
@@ -3691,7 +3479,7 @@
             <a:endParaRPr lang="en-US" sz="1200" dirty="0"/>
           </a:p>
           <a:p>
-            <a:pPr algn="ctr" indent="0" marL="0">
+            <a:pPr marL="0" indent="0" algn="ctr">
               <a:buNone/>
             </a:pPr>
             <a:r>
@@ -3752,7 +3540,7 @@
           <a:bodyPr wrap="square" lIns="0" tIns="0" rIns="0" bIns="0" rtlCol="0" anchor="ctr"/>
           <a:lstStyle/>
           <a:p>
-            <a:pPr algn="ctr" indent="0" marL="0">
+            <a:pPr marL="0" indent="0" algn="ctr">
               <a:buNone/>
             </a:pPr>
             <a:r>
@@ -3788,7 +3576,7 @@
           <a:bodyPr wrap="square" lIns="0" tIns="0" rIns="0" bIns="0" rtlCol="0" anchor="t"/>
           <a:lstStyle/>
           <a:p>
-            <a:pPr algn="ctr" indent="0" marL="0">
+            <a:pPr marL="0" indent="0" algn="ctr">
               <a:buNone/>
             </a:pPr>
             <a:r>
@@ -3802,7 +3590,7 @@
             <a:endParaRPr lang="en-US" sz="1200" dirty="0"/>
           </a:p>
           <a:p>
-            <a:pPr algn="ctr" indent="0" marL="0">
+            <a:pPr marL="0" indent="0" algn="ctr">
               <a:buNone/>
             </a:pPr>
             <a:r>
@@ -3865,7 +3653,7 @@
           <a:bodyPr wrap="square" lIns="0" tIns="0" rIns="0" bIns="0" rtlCol="0" anchor="ctr"/>
           <a:lstStyle/>
           <a:p>
-            <a:pPr algn="ctr" indent="0" marL="0">
+            <a:pPr marL="0" indent="0" algn="ctr">
               <a:buNone/>
             </a:pPr>
             <a:r>
@@ -3901,11 +3689,11 @@
           <a:bodyPr wrap="square" lIns="0" tIns="0" rIns="0" bIns="0" rtlCol="0" anchor="ctr"/>
           <a:lstStyle/>
           <a:p>
-            <a:pPr indent="0" marL="0">
+            <a:pPr marL="0" indent="0">
               <a:buNone/>
             </a:pPr>
             <a:r>
-              <a:rPr lang="en-US" sz="1000" b="1" spc="200" kern="0" dirty="0">
+              <a:rPr lang="en-US" sz="1000" b="1" kern="0" spc="200" dirty="0">
                 <a:solidFill>
                   <a:schemeClr val="accent1"/>
                 </a:solidFill>
@@ -3964,7 +3752,7 @@
           <a:bodyPr wrap="square" lIns="0" tIns="0" rIns="0" bIns="0" rtlCol="0" anchor="ctr"/>
           <a:lstStyle/>
           <a:p>
-            <a:pPr algn="ctr" indent="0" marL="0">
+            <a:pPr marL="0" indent="0" algn="ctr">
               <a:buNone/>
             </a:pPr>
             <a:r>
@@ -4027,7 +3815,7 @@
           <a:bodyPr wrap="square" lIns="0" tIns="0" rIns="0" bIns="0" rtlCol="0" anchor="ctr"/>
           <a:lstStyle/>
           <a:p>
-            <a:pPr algn="ctr" indent="0" marL="0">
+            <a:pPr marL="0" indent="0" algn="ctr">
               <a:buNone/>
             </a:pPr>
             <a:r>
@@ -4090,7 +3878,7 @@
           <a:bodyPr wrap="square" lIns="0" tIns="0" rIns="0" bIns="0" rtlCol="0" anchor="ctr"/>
           <a:lstStyle/>
           <a:p>
-            <a:pPr algn="ctr" indent="0" marL="0">
+            <a:pPr marL="0" indent="0" algn="ctr">
               <a:buNone/>
             </a:pPr>
             <a:r>
@@ -4153,7 +3941,7 @@
           <a:bodyPr wrap="square" lIns="0" tIns="0" rIns="0" bIns="0" rtlCol="0" anchor="ctr"/>
           <a:lstStyle/>
           <a:p>
-            <a:pPr algn="ctr" indent="0" marL="0">
+            <a:pPr marL="0" indent="0" algn="ctr">
               <a:buNone/>
             </a:pPr>
             <a:r>
@@ -4189,11 +3977,11 @@
           <a:bodyPr wrap="square" lIns="0" tIns="0" rIns="0" bIns="0" rtlCol="0" anchor="ctr"/>
           <a:lstStyle/>
           <a:p>
-            <a:pPr indent="0" marL="0">
+            <a:pPr marL="0" indent="0">
               <a:buNone/>
             </a:pPr>
             <a:r>
-              <a:rPr lang="en-US" sz="1000" b="1" spc="200" kern="0" dirty="0">
+              <a:rPr lang="en-US" sz="1000" b="1" kern="0" spc="200" dirty="0">
                 <a:solidFill>
                   <a:schemeClr val="accent1"/>
                 </a:solidFill>
@@ -4252,7 +4040,7 @@
           <a:bodyPr wrap="square" lIns="0" tIns="0" rIns="0" bIns="0" rtlCol="0" anchor="ctr"/>
           <a:lstStyle/>
           <a:p>
-            <a:pPr algn="ctr" indent="0" marL="0">
+            <a:pPr marL="0" indent="0" algn="ctr">
               <a:buNone/>
             </a:pPr>
             <a:r>
@@ -4315,7 +4103,7 @@
           <a:bodyPr wrap="square" lIns="0" tIns="0" rIns="0" bIns="0" rtlCol="0" anchor="ctr"/>
           <a:lstStyle/>
           <a:p>
-            <a:pPr algn="ctr" indent="0" marL="0">
+            <a:pPr marL="0" indent="0" algn="ctr">
               <a:buNone/>
             </a:pPr>
             <a:r>
@@ -4378,7 +4166,7 @@
           <a:bodyPr wrap="square" lIns="0" tIns="0" rIns="0" bIns="0" rtlCol="0" anchor="ctr"/>
           <a:lstStyle/>
           <a:p>
-            <a:pPr algn="ctr" indent="0" marL="0">
+            <a:pPr marL="0" indent="0" algn="ctr">
               <a:buNone/>
             </a:pPr>
             <a:r>
@@ -4395,7 +4183,7 @@
       </p:sp>
       <p:sp>
         <p:nvSpPr>
-          <p:cNvPr id="25" name="Slide Number Placeholder 0"/>
+          <p:cNvPr id="3" name="Slide Number Placeholder 0"/>
           <p:cNvSpPr>
             <a:spLocks noGrp="1"/>
           </p:cNvSpPr>
@@ -4413,7 +4201,7 @@
           </a:prstGeom>
           <a:extLst>
             <a:ext uri="{C572A759-6A51-4108-AA02-DFA0A04FC94B}">
-              <ma14:wrappingTextBoxFlag xmlns:ma14="http://schemas.microsoft.com/office/mac/drawingml/2011/main" val="0"/>
+              <ma14:wrappingTextBoxFlag xmlns:ma14="http://schemas.microsoft.com/office/mac/drawingml/2011/main" xmlns="" val="0"/>
             </a:ext>
           </a:extLst>
         </p:spPr>
@@ -4431,7 +4219,7 @@
           <a:p>
             <a:pPr algn="r"/>
             <a:fld id="{F7021451-1387-4CA6-816F-3879F97B5CBC}" type="slidenum">
-              <a:rPr b="0" lang="en-US"/>
+              <a:rPr lang="en-US" b="0"/>
               <a:t>2</a:t>
             </a:fld>
             <a:endParaRPr lang="en-US"/>
@@ -5955,9 +5743,11 @@
       <p:sp>
         <p:nvSpPr>
           <p:cNvPr id="2" name="Text 1"/>
-          <p:cNvSpPr/>
+          <p:cNvSpPr>
+            <a:spLocks noGrp="1"/>
+          </p:cNvSpPr>
           <p:nvPr>
-            <p:ph idx="101" type="title" hasCustomPrompt="1"/>
+            <p:ph type="title" idx="101" hasCustomPrompt="1"/>
           </p:nvPr>
         </p:nvSpPr>
         <p:spPr>
@@ -5975,7 +5765,7 @@
           <a:bodyPr wrap="square" lIns="0" tIns="0" rIns="0" bIns="0" rtlCol="0" anchor="ctr"/>
           <a:lstStyle/>
           <a:p>
-            <a:pPr algn="l" indent="0" marL="0">
+            <a:pPr marL="0" indent="0" algn="l">
               <a:buNone/>
             </a:pPr>
             <a:r>
@@ -6061,11 +5851,11 @@
           <a:bodyPr wrap="square" lIns="0" tIns="0" rIns="0" bIns="0" rtlCol="0" anchor="ctr"/>
           <a:lstStyle/>
           <a:p>
-            <a:pPr algn="r" indent="0" marL="0">
+            <a:pPr marL="0" indent="0" algn="r">
               <a:buNone/>
             </a:pPr>
             <a:r>
-              <a:rPr lang="en-US" sz="900" b="1" spc="100" kern="0" dirty="0">
+              <a:rPr lang="en-US" sz="900" b="1" kern="0" spc="100" dirty="0">
                 <a:solidFill>
                   <a:schemeClr val="accent1"/>
                 </a:solidFill>
@@ -6149,7 +5939,7 @@
           <a:bodyPr wrap="square" lIns="0" tIns="0" rIns="0" bIns="0" rtlCol="0" anchor="ctr"/>
           <a:lstStyle/>
           <a:p>
-            <a:pPr indent="0" marL="0">
+            <a:pPr marL="0" indent="0">
               <a:buNone/>
             </a:pPr>
             <a:r>
@@ -6313,7 +6103,7 @@
           <a:bodyPr wrap="square" lIns="0" tIns="0" rIns="0" bIns="0" rtlCol="0" anchor="ctr"/>
           <a:lstStyle/>
           <a:p>
-            <a:pPr indent="0" marL="0">
+            <a:pPr marL="0" indent="0">
               <a:buNone/>
             </a:pPr>
             <a:r>
@@ -6477,7 +6267,7 @@
           <a:bodyPr wrap="square" lIns="0" tIns="0" rIns="0" bIns="0" rtlCol="0" anchor="ctr"/>
           <a:lstStyle/>
           <a:p>
-            <a:pPr indent="0" marL="0">
+            <a:pPr marL="0" indent="0">
               <a:buNone/>
             </a:pPr>
             <a:r>
@@ -6641,7 +6431,7 @@
           <a:bodyPr wrap="square" lIns="0" tIns="0" rIns="0" bIns="0" rtlCol="0" anchor="ctr"/>
           <a:lstStyle/>
           <a:p>
-            <a:pPr indent="0" marL="0">
+            <a:pPr marL="0" indent="0">
               <a:buNone/>
             </a:pPr>
             <a:r>
@@ -6805,7 +6595,7 @@
           <a:bodyPr wrap="square" lIns="0" tIns="0" rIns="0" bIns="0" rtlCol="0" anchor="ctr"/>
           <a:lstStyle/>
           <a:p>
-            <a:pPr indent="0" marL="0">
+            <a:pPr marL="0" indent="0">
               <a:buNone/>
             </a:pPr>
             <a:r>
@@ -6969,7 +6759,7 @@
           <a:bodyPr wrap="square" lIns="0" tIns="0" rIns="0" bIns="0" rtlCol="0" anchor="ctr"/>
           <a:lstStyle/>
           <a:p>
-            <a:pPr indent="0" marL="0">
+            <a:pPr marL="0" indent="0">
               <a:buNone/>
             </a:pPr>
             <a:r>
@@ -7062,7 +6852,7 @@
       </p:sp>
       <p:sp>
         <p:nvSpPr>
-          <p:cNvPr id="25" name="Slide Number Placeholder 0"/>
+          <p:cNvPr id="3" name="Slide Number Placeholder 0"/>
           <p:cNvSpPr>
             <a:spLocks noGrp="1"/>
           </p:cNvSpPr>
@@ -7080,7 +6870,7 @@
           </a:prstGeom>
           <a:extLst>
             <a:ext uri="{C572A759-6A51-4108-AA02-DFA0A04FC94B}">
-              <ma14:wrappingTextBoxFlag xmlns:ma14="http://schemas.microsoft.com/office/mac/drawingml/2011/main" val="0"/>
+              <ma14:wrappingTextBoxFlag xmlns:ma14="http://schemas.microsoft.com/office/mac/drawingml/2011/main" xmlns="" val="0"/>
             </a:ext>
           </a:extLst>
         </p:spPr>
@@ -7098,7 +6888,7 @@
           <a:p>
             <a:pPr algn="r"/>
             <a:fld id="{F7021451-1387-4CA6-816F-3879F97B5CBC}" type="slidenum">
-              <a:rPr b="0" lang="en-US"/>
+              <a:rPr lang="en-US" b="0"/>
               <a:t>3</a:t>
             </a:fld>
             <a:endParaRPr lang="en-US"/>
@@ -8062,9 +7852,11 @@
       <p:sp>
         <p:nvSpPr>
           <p:cNvPr id="2" name="Text 1"/>
-          <p:cNvSpPr/>
+          <p:cNvSpPr>
+            <a:spLocks noGrp="1"/>
+          </p:cNvSpPr>
           <p:nvPr>
-            <p:ph idx="101" type="title" hasCustomPrompt="1"/>
+            <p:ph type="title" idx="101" hasCustomPrompt="1"/>
           </p:nvPr>
         </p:nvSpPr>
         <p:spPr>
@@ -8082,7 +7874,7 @@
           <a:bodyPr wrap="square" lIns="0" tIns="0" rIns="0" bIns="0" rtlCol="0" anchor="ctr"/>
           <a:lstStyle/>
           <a:p>
-            <a:pPr algn="l" indent="0" marL="0">
+            <a:pPr marL="0" indent="0" algn="l">
               <a:buNone/>
             </a:pPr>
             <a:r>
@@ -8168,11 +7960,11 @@
           <a:bodyPr wrap="square" lIns="0" tIns="0" rIns="0" bIns="0" rtlCol="0" anchor="ctr"/>
           <a:lstStyle/>
           <a:p>
-            <a:pPr algn="r" indent="0" marL="0">
+            <a:pPr marL="0" indent="0" algn="r">
               <a:buNone/>
             </a:pPr>
             <a:r>
-              <a:rPr lang="en-US" sz="900" b="1" spc="100" kern="0" dirty="0">
+              <a:rPr lang="en-US" sz="900" b="1" kern="0" spc="100" dirty="0">
                 <a:solidFill>
                   <a:schemeClr val="accent1"/>
                 </a:solidFill>
@@ -8204,11 +7996,11 @@
           <a:bodyPr wrap="square" lIns="0" tIns="0" rIns="0" bIns="0" rtlCol="0" anchor="ctr"/>
           <a:lstStyle/>
           <a:p>
-            <a:pPr indent="0" marL="0">
+            <a:pPr marL="0" indent="0">
               <a:buNone/>
             </a:pPr>
             <a:r>
-              <a:rPr lang="en-US" sz="1200" b="1" spc="300" kern="0" dirty="0">
+              <a:rPr lang="en-US" sz="1200" b="1" kern="0" spc="300" dirty="0">
                 <a:solidFill>
                   <a:schemeClr val="accent1"/>
                 </a:solidFill>
@@ -8265,7 +8057,7 @@
           <a:bodyPr wrap="square" lIns="0" tIns="0" rIns="0" bIns="0" rtlCol="0" anchor="t"/>
           <a:lstStyle/>
           <a:p>
-            <a:pPr indent="0" marL="0">
+            <a:pPr marL="0" indent="0">
               <a:buNone/>
             </a:pPr>
             <a:r>
@@ -8279,7 +8071,7 @@
             <a:endParaRPr lang="en-US" sz="1400" dirty="0"/>
           </a:p>
           <a:p>
-            <a:pPr indent="0" marL="0">
+            <a:pPr marL="0" indent="0">
               <a:buNone/>
             </a:pPr>
             <a:r>
@@ -8340,7 +8132,7 @@
           <a:bodyPr wrap="square" lIns="0" tIns="0" rIns="0" bIns="0" rtlCol="0" anchor="t"/>
           <a:lstStyle/>
           <a:p>
-            <a:pPr indent="0" marL="0">
+            <a:pPr marL="0" indent="0">
               <a:buNone/>
             </a:pPr>
             <a:r>
@@ -8354,7 +8146,7 @@
             <a:endParaRPr lang="en-US" sz="1400" dirty="0"/>
           </a:p>
           <a:p>
-            <a:pPr indent="0" marL="0">
+            <a:pPr marL="0" indent="0">
               <a:buNone/>
             </a:pPr>
             <a:r>
@@ -8415,7 +8207,7 @@
           <a:bodyPr wrap="square" lIns="0" tIns="0" rIns="0" bIns="0" rtlCol="0" anchor="t"/>
           <a:lstStyle/>
           <a:p>
-            <a:pPr indent="0" marL="0">
+            <a:pPr marL="0" indent="0">
               <a:buNone/>
             </a:pPr>
             <a:r>
@@ -8429,7 +8221,7 @@
             <a:endParaRPr lang="en-US" sz="1400" dirty="0"/>
           </a:p>
           <a:p>
-            <a:pPr indent="0" marL="0">
+            <a:pPr marL="0" indent="0">
               <a:buNone/>
             </a:pPr>
             <a:r>
@@ -8490,7 +8282,7 @@
           <a:bodyPr wrap="square" lIns="0" tIns="0" rIns="0" bIns="0" rtlCol="0" anchor="t"/>
           <a:lstStyle/>
           <a:p>
-            <a:pPr indent="0" marL="0">
+            <a:pPr marL="0" indent="0">
               <a:buNone/>
             </a:pPr>
             <a:r>
@@ -8504,7 +8296,7 @@
             <a:endParaRPr lang="en-US" sz="1400" dirty="0"/>
           </a:p>
           <a:p>
-            <a:pPr indent="0" marL="0">
+            <a:pPr marL="0" indent="0">
               <a:buNone/>
             </a:pPr>
             <a:r>
@@ -8567,11 +8359,11 @@
           <a:bodyPr wrap="square" lIns="0" tIns="0" rIns="0" bIns="0" rtlCol="0" anchor="ctr"/>
           <a:lstStyle/>
           <a:p>
-            <a:pPr indent="0" marL="0">
+            <a:pPr marL="0" indent="0">
               <a:buNone/>
             </a:pPr>
             <a:r>
-              <a:rPr lang="en-US" sz="850" b="1" spc="100" kern="0" dirty="0">
+              <a:rPr lang="en-US" sz="850" b="1" kern="0" spc="100" dirty="0">
                 <a:solidFill>
                   <a:schemeClr val="accent1"/>
                 </a:solidFill>
@@ -8603,7 +8395,7 @@
           <a:bodyPr wrap="square" lIns="0" tIns="0" rIns="0" bIns="0" rtlCol="0" anchor="t"/>
           <a:lstStyle/>
           <a:p>
-            <a:pPr indent="0" marL="0">
+            <a:pPr marL="0" indent="0">
               <a:buNone/>
             </a:pPr>
             <a:r>
@@ -8620,7 +8412,7 @@
             <a:endParaRPr lang="en-US" sz="2400" dirty="0"/>
           </a:p>
           <a:p>
-            <a:pPr indent="0" marL="0">
+            <a:pPr marL="0" indent="0">
               <a:buNone/>
             </a:pPr>
             <a:r>
@@ -8656,7 +8448,7 @@
           <a:bodyPr wrap="square" lIns="0" tIns="0" rIns="0" bIns="0" rtlCol="0" anchor="t"/>
           <a:lstStyle/>
           <a:p>
-            <a:pPr indent="0" marL="0">
+            <a:pPr marL="0" indent="0">
               <a:buNone/>
             </a:pPr>
             <a:r>
@@ -8673,7 +8465,7 @@
             <a:endParaRPr lang="en-US" sz="2400" dirty="0"/>
           </a:p>
           <a:p>
-            <a:pPr indent="0" marL="0">
+            <a:pPr marL="0" indent="0">
               <a:buNone/>
             </a:pPr>
             <a:r>
@@ -8709,7 +8501,7 @@
           <a:bodyPr wrap="square" lIns="0" tIns="0" rIns="0" bIns="0" rtlCol="0" anchor="t"/>
           <a:lstStyle/>
           <a:p>
-            <a:pPr indent="0" marL="0">
+            <a:pPr marL="0" indent="0">
               <a:buNone/>
             </a:pPr>
             <a:r>
@@ -8726,7 +8518,7 @@
             <a:endParaRPr lang="en-US" sz="2400" dirty="0"/>
           </a:p>
           <a:p>
-            <a:pPr indent="0" marL="0">
+            <a:pPr marL="0" indent="0">
               <a:buNone/>
             </a:pPr>
             <a:r>
@@ -8762,11 +8554,11 @@
           <a:bodyPr wrap="square" lIns="0" tIns="0" rIns="0" bIns="0" rtlCol="0" anchor="ctr"/>
           <a:lstStyle/>
           <a:p>
-            <a:pPr indent="0" marL="0">
+            <a:pPr marL="0" indent="0">
               <a:buNone/>
             </a:pPr>
             <a:r>
-              <a:rPr lang="en-US" sz="1200" b="1" spc="300" kern="0" dirty="0">
+              <a:rPr lang="en-US" sz="1200" b="1" kern="0" spc="300" dirty="0">
                 <a:solidFill>
                   <a:schemeClr val="accent1"/>
                 </a:solidFill>
@@ -8825,7 +8617,7 @@
           <a:bodyPr wrap="square" lIns="0" tIns="0" rIns="0" bIns="0" rtlCol="0" anchor="ctr"/>
           <a:lstStyle/>
           <a:p>
-            <a:pPr indent="0" marL="0">
+            <a:pPr marL="0" indent="0">
               <a:buNone/>
             </a:pPr>
             <a:r>
@@ -8888,7 +8680,7 @@
           <a:bodyPr wrap="square" lIns="0" tIns="0" rIns="0" bIns="0" rtlCol="0" anchor="ctr"/>
           <a:lstStyle/>
           <a:p>
-            <a:pPr indent="0" marL="0">
+            <a:pPr marL="0" indent="0">
               <a:buNone/>
             </a:pPr>
             <a:r>
@@ -8951,7 +8743,7 @@
           <a:bodyPr wrap="square" lIns="0" tIns="0" rIns="0" bIns="0" rtlCol="0" anchor="ctr"/>
           <a:lstStyle/>
           <a:p>
-            <a:pPr indent="0" marL="0">
+            <a:pPr marL="0" indent="0">
               <a:buNone/>
             </a:pPr>
             <a:r>
@@ -8968,7 +8760,7 @@
       </p:sp>
       <p:sp>
         <p:nvSpPr>
-          <p:cNvPr id="25" name="Slide Number Placeholder 0"/>
+          <p:cNvPr id="3" name="Slide Number Placeholder 0"/>
           <p:cNvSpPr>
             <a:spLocks noGrp="1"/>
           </p:cNvSpPr>
@@ -8986,7 +8778,7 @@
           </a:prstGeom>
           <a:extLst>
             <a:ext uri="{C572A759-6A51-4108-AA02-DFA0A04FC94B}">
-              <ma14:wrappingTextBoxFlag xmlns:ma14="http://schemas.microsoft.com/office/mac/drawingml/2011/main" val="0"/>
+              <ma14:wrappingTextBoxFlag xmlns:ma14="http://schemas.microsoft.com/office/mac/drawingml/2011/main" xmlns="" val="0"/>
             </a:ext>
           </a:extLst>
         </p:spPr>
@@ -9004,7 +8796,7 @@
           <a:p>
             <a:pPr algn="r"/>
             <a:fld id="{F7021451-1387-4CA6-816F-3879F97B5CBC}" type="slidenum">
-              <a:rPr b="0" lang="en-US"/>
+              <a:rPr lang="en-US" b="0"/>
               <a:t>4</a:t>
             </a:fld>
             <a:endParaRPr lang="en-US"/>
@@ -9863,9 +9655,11 @@
       <p:sp>
         <p:nvSpPr>
           <p:cNvPr id="2" name="Text 1"/>
-          <p:cNvSpPr/>
+          <p:cNvSpPr>
+            <a:spLocks noGrp="1"/>
+          </p:cNvSpPr>
           <p:nvPr>
-            <p:ph idx="101" type="title" hasCustomPrompt="1"/>
+            <p:ph type="title" idx="101" hasCustomPrompt="1"/>
           </p:nvPr>
         </p:nvSpPr>
         <p:spPr>
@@ -9883,7 +9677,7 @@
           <a:bodyPr wrap="square" lIns="0" tIns="0" rIns="0" bIns="0" rtlCol="0" anchor="ctr"/>
           <a:lstStyle/>
           <a:p>
-            <a:pPr algn="l" indent="0" marL="0">
+            <a:pPr marL="0" indent="0" algn="l">
               <a:buNone/>
             </a:pPr>
             <a:r>
@@ -9969,11 +9763,11 @@
           <a:bodyPr wrap="square" lIns="0" tIns="0" rIns="0" bIns="0" rtlCol="0" anchor="ctr"/>
           <a:lstStyle/>
           <a:p>
-            <a:pPr algn="r" indent="0" marL="0">
+            <a:pPr marL="0" indent="0" algn="r">
               <a:buNone/>
             </a:pPr>
             <a:r>
-              <a:rPr lang="en-US" sz="900" b="1" spc="100" kern="0" dirty="0">
+              <a:rPr lang="en-US" sz="900" b="1" kern="0" spc="100" dirty="0">
                 <a:solidFill>
                   <a:schemeClr val="accent3"/>
                 </a:solidFill>
@@ -10032,7 +9826,7 @@
           <a:bodyPr wrap="square" lIns="0" tIns="0" rIns="0" bIns="0" rtlCol="0" anchor="ctr"/>
           <a:lstStyle/>
           <a:p>
-            <a:pPr algn="ctr" indent="0" marL="0">
+            <a:pPr marL="0" indent="0" algn="ctr">
               <a:buNone/>
             </a:pPr>
             <a:r>
@@ -10068,7 +9862,7 @@
           <a:bodyPr wrap="square" lIns="0" tIns="0" rIns="0" bIns="0" rtlCol="0" anchor="ctr"/>
           <a:lstStyle/>
           <a:p>
-            <a:pPr algn="ctr" indent="0" marL="0">
+            <a:pPr marL="0" indent="0" algn="ctr">
               <a:buNone/>
             </a:pPr>
             <a:r>
@@ -10104,7 +9898,7 @@
           <a:bodyPr wrap="square" lIns="0" tIns="0" rIns="0" bIns="0" rtlCol="0" anchor="ctr"/>
           <a:lstStyle/>
           <a:p>
-            <a:pPr algn="ctr" indent="0" marL="0">
+            <a:pPr marL="0" indent="0" algn="ctr">
               <a:buNone/>
             </a:pPr>
             <a:r>
@@ -10140,7 +9934,7 @@
           <a:bodyPr wrap="square" lIns="0" tIns="0" rIns="0" bIns="0" rtlCol="0" anchor="ctr"/>
           <a:lstStyle/>
           <a:p>
-            <a:pPr algn="ctr" indent="0" marL="0">
+            <a:pPr marL="0" indent="0" algn="ctr">
               <a:buNone/>
             </a:pPr>
             <a:r>
@@ -10175,7 +9969,7 @@
           </a:prstGeom>
           <a:extLst>
             <a:ext uri="{C572A759-6A51-4108-AA02-DFA0A04FC94B}">
-              <ma14:wrappingTextBoxFlag xmlns:ma14="http://schemas.microsoft.com/office/mac/drawingml/2011/main" val="0"/>
+              <ma14:wrappingTextBoxFlag xmlns:ma14="http://schemas.microsoft.com/office/mac/drawingml/2011/main" xmlns="" val="0"/>
             </a:ext>
           </a:extLst>
         </p:spPr>
@@ -10193,13 +9987,43 @@
           <a:p>
             <a:pPr algn="r"/>
             <a:fld id="{F7021451-1387-4CA6-816F-3879F97B5CBC}" type="slidenum">
-              <a:rPr b="0" lang="en-US"/>
+              <a:rPr lang="en-US" b="0"/>
               <a:t>5</a:t>
             </a:fld>
             <a:endParaRPr lang="en-US"/>
           </a:p>
         </p:txBody>
       </p:sp>
+      <p:pic>
+        <p:nvPicPr>
+          <p:cNvPr id="12" name="Picture 11">
+            <a:extLst>
+              <a:ext uri="{FF2B5EF4-FFF2-40B4-BE49-F238E27FC236}">
+                <a16:creationId xmlns:a16="http://schemas.microsoft.com/office/drawing/2014/main" id="{7E100400-B64B-348D-36CD-37B4FA1F08BE}"/>
+              </a:ext>
+            </a:extLst>
+          </p:cNvPr>
+          <p:cNvPicPr>
+            <a:picLocks noChangeAspect="1"/>
+          </p:cNvPicPr>
+          <p:nvPr/>
+        </p:nvPicPr>
+        <p:blipFill>
+          <a:blip r:embed="rId3"/>
+          <a:stretch>
+            <a:fillRect/>
+          </a:stretch>
+        </p:blipFill>
+        <p:spPr>
+          <a:xfrm>
+            <a:off x="0" y="0"/>
+            <a:ext cx="9144000" cy="5143499"/>
+          </a:xfrm>
+          <a:prstGeom prst="rect">
+            <a:avLst/>
+          </a:prstGeom>
+        </p:spPr>
+      </p:pic>
     </p:spTree>
   </p:cSld>
   <p:clrMapOvr>
@@ -10765,4 +10589,319 @@
     </a:ext>
   </a:extLst>
 </a:theme>
+</file>
+
+<file path=ppt/theme/theme2.xml><?xml version="1.0" encoding="utf-8"?>
+<a:theme xmlns:a="http://schemas.openxmlformats.org/drawingml/2006/main" name="Office Theme">
+  <a:themeElements>
+    <a:clrScheme name="Office">
+      <a:dk1>
+        <a:sysClr val="windowText" lastClr="000000"/>
+      </a:dk1>
+      <a:lt1>
+        <a:sysClr val="window" lastClr="FFFFFF"/>
+      </a:lt1>
+      <a:dk2>
+        <a:srgbClr val="0E2841"/>
+      </a:dk2>
+      <a:lt2>
+        <a:srgbClr val="E8E8E8"/>
+      </a:lt2>
+      <a:accent1>
+        <a:srgbClr val="156082"/>
+      </a:accent1>
+      <a:accent2>
+        <a:srgbClr val="E97132"/>
+      </a:accent2>
+      <a:accent3>
+        <a:srgbClr val="196B24"/>
+      </a:accent3>
+      <a:accent4>
+        <a:srgbClr val="0F9ED5"/>
+      </a:accent4>
+      <a:accent5>
+        <a:srgbClr val="A02B93"/>
+      </a:accent5>
+      <a:accent6>
+        <a:srgbClr val="4EA72E"/>
+      </a:accent6>
+      <a:hlink>
+        <a:srgbClr val="467886"/>
+      </a:hlink>
+      <a:folHlink>
+        <a:srgbClr val="96607D"/>
+      </a:folHlink>
+    </a:clrScheme>
+    <a:fontScheme name="Office">
+      <a:majorFont>
+        <a:latin typeface="Aptos Display" panose="02110004020202020204"/>
+        <a:ea typeface=""/>
+        <a:cs typeface=""/>
+        <a:font script="Jpan" typeface="游ゴシック Light"/>
+        <a:font script="Hang" typeface="맑은 고딕"/>
+        <a:font script="Hans" typeface="等线 Light"/>
+        <a:font script="Hant" typeface="新細明體"/>
+        <a:font script="Arab" typeface="Times New Roman"/>
+        <a:font script="Hebr" typeface="Times New Roman"/>
+        <a:font script="Thai" typeface="Angsana New"/>
+        <a:font script="Ethi" typeface="Nyala"/>
+        <a:font script="Beng" typeface="Vrinda"/>
+        <a:font script="Gujr" typeface="Shruti"/>
+        <a:font script="Khmr" typeface="MoolBoran"/>
+        <a:font script="Knda" typeface="Tunga"/>
+        <a:font script="Guru" typeface="Raavi"/>
+        <a:font script="Cans" typeface="Euphemia"/>
+        <a:font script="Cher" typeface="Plantagenet Cherokee"/>
+        <a:font script="Yiii" typeface="Microsoft Yi Baiti"/>
+        <a:font script="Tibt" typeface="Microsoft Himalaya"/>
+        <a:font script="Thaa" typeface="MV Boli"/>
+        <a:font script="Deva" typeface="Mangal"/>
+        <a:font script="Telu" typeface="Gautami"/>
+        <a:font script="Taml" typeface="Latha"/>
+        <a:font script="Syrc" typeface="Estrangelo Edessa"/>
+        <a:font script="Orya" typeface="Kalinga"/>
+        <a:font script="Mlym" typeface="Kartika"/>
+        <a:font script="Laoo" typeface="DokChampa"/>
+        <a:font script="Sinh" typeface="Iskoola Pota"/>
+        <a:font script="Mong" typeface="Mongolian Baiti"/>
+        <a:font script="Viet" typeface="Times New Roman"/>
+        <a:font script="Uigh" typeface="Microsoft Uighur"/>
+        <a:font script="Geor" typeface="Sylfaen"/>
+        <a:font script="Armn" typeface="Arial"/>
+        <a:font script="Bugi" typeface="Leelawadee UI"/>
+        <a:font script="Bopo" typeface="Microsoft JhengHei"/>
+        <a:font script="Java" typeface="Javanese Text"/>
+        <a:font script="Lisu" typeface="Segoe UI"/>
+        <a:font script="Mymr" typeface="Myanmar Text"/>
+        <a:font script="Nkoo" typeface="Ebrima"/>
+        <a:font script="Olck" typeface="Nirmala UI"/>
+        <a:font script="Osma" typeface="Ebrima"/>
+        <a:font script="Phag" typeface="Phagspa"/>
+        <a:font script="Syrn" typeface="Estrangelo Edessa"/>
+        <a:font script="Syrj" typeface="Estrangelo Edessa"/>
+        <a:font script="Syre" typeface="Estrangelo Edessa"/>
+        <a:font script="Sora" typeface="Nirmala UI"/>
+        <a:font script="Tale" typeface="Microsoft Tai Le"/>
+        <a:font script="Talu" typeface="Microsoft New Tai Lue"/>
+        <a:font script="Tfng" typeface="Ebrima"/>
+      </a:majorFont>
+      <a:minorFont>
+        <a:latin typeface="Aptos" panose="02110004020202020204"/>
+        <a:ea typeface=""/>
+        <a:cs typeface=""/>
+        <a:font script="Jpan" typeface="游ゴシック"/>
+        <a:font script="Hang" typeface="맑은 고딕"/>
+        <a:font script="Hans" typeface="等线"/>
+        <a:font script="Hant" typeface="新細明體"/>
+        <a:font script="Arab" typeface="Arial"/>
+        <a:font script="Hebr" typeface="Arial"/>
+        <a:font script="Thai" typeface="Cordia New"/>
+        <a:font script="Ethi" typeface="Nyala"/>
+        <a:font script="Beng" typeface="Vrinda"/>
+        <a:font script="Gujr" typeface="Shruti"/>
+        <a:font script="Khmr" typeface="DaunPenh"/>
+        <a:font script="Knda" typeface="Tunga"/>
+        <a:font script="Guru" typeface="Raavi"/>
+        <a:font script="Cans" typeface="Euphemia"/>
+        <a:font script="Cher" typeface="Plantagenet Cherokee"/>
+        <a:font script="Yiii" typeface="Microsoft Yi Baiti"/>
+        <a:font script="Tibt" typeface="Microsoft Himalaya"/>
+        <a:font script="Thaa" typeface="MV Boli"/>
+        <a:font script="Deva" typeface="Mangal"/>
+        <a:font script="Telu" typeface="Gautami"/>
+        <a:font script="Taml" typeface="Latha"/>
+        <a:font script="Syrc" typeface="Estrangelo Edessa"/>
+        <a:font script="Orya" typeface="Kalinga"/>
+        <a:font script="Mlym" typeface="Kartika"/>
+        <a:font script="Laoo" typeface="DokChampa"/>
+        <a:font script="Sinh" typeface="Iskoola Pota"/>
+        <a:font script="Mong" typeface="Mongolian Baiti"/>
+        <a:font script="Viet" typeface="Arial"/>
+        <a:font script="Uigh" typeface="Microsoft Uighur"/>
+        <a:font script="Geor" typeface="Sylfaen"/>
+        <a:font script="Armn" typeface="Arial"/>
+        <a:font script="Bugi" typeface="Leelawadee UI"/>
+        <a:font script="Bopo" typeface="Microsoft JhengHei"/>
+        <a:font script="Java" typeface="Javanese Text"/>
+        <a:font script="Lisu" typeface="Segoe UI"/>
+        <a:font script="Mymr" typeface="Myanmar Text"/>
+        <a:font script="Nkoo" typeface="Ebrima"/>
+        <a:font script="Olck" typeface="Nirmala UI"/>
+        <a:font script="Osma" typeface="Ebrima"/>
+        <a:font script="Phag" typeface="Phagspa"/>
+        <a:font script="Syrn" typeface="Estrangelo Edessa"/>
+        <a:font script="Syrj" typeface="Estrangelo Edessa"/>
+        <a:font script="Syre" typeface="Estrangelo Edessa"/>
+        <a:font script="Sora" typeface="Nirmala UI"/>
+        <a:font script="Tale" typeface="Microsoft Tai Le"/>
+        <a:font script="Talu" typeface="Microsoft New Tai Lue"/>
+        <a:font script="Tfng" typeface="Ebrima"/>
+      </a:minorFont>
+    </a:fontScheme>
+    <a:fmtScheme name="Office">
+      <a:fillStyleLst>
+        <a:solidFill>
+          <a:schemeClr val="phClr"/>
+        </a:solidFill>
+        <a:gradFill rotWithShape="1">
+          <a:gsLst>
+            <a:gs pos="0">
+              <a:schemeClr val="phClr">
+                <a:lumMod val="110000"/>
+                <a:satMod val="105000"/>
+                <a:tint val="67000"/>
+              </a:schemeClr>
+            </a:gs>
+            <a:gs pos="50000">
+              <a:schemeClr val="phClr">
+                <a:lumMod val="105000"/>
+                <a:satMod val="103000"/>
+                <a:tint val="73000"/>
+              </a:schemeClr>
+            </a:gs>
+            <a:gs pos="100000">
+              <a:schemeClr val="phClr">
+                <a:lumMod val="105000"/>
+                <a:satMod val="109000"/>
+                <a:tint val="81000"/>
+              </a:schemeClr>
+            </a:gs>
+          </a:gsLst>
+          <a:lin ang="5400000" scaled="0"/>
+        </a:gradFill>
+        <a:gradFill rotWithShape="1">
+          <a:gsLst>
+            <a:gs pos="0">
+              <a:schemeClr val="phClr">
+                <a:satMod val="103000"/>
+                <a:lumMod val="102000"/>
+                <a:tint val="94000"/>
+              </a:schemeClr>
+            </a:gs>
+            <a:gs pos="50000">
+              <a:schemeClr val="phClr">
+                <a:satMod val="110000"/>
+                <a:lumMod val="100000"/>
+                <a:shade val="100000"/>
+              </a:schemeClr>
+            </a:gs>
+            <a:gs pos="100000">
+              <a:schemeClr val="phClr">
+                <a:lumMod val="99000"/>
+                <a:satMod val="120000"/>
+                <a:shade val="78000"/>
+              </a:schemeClr>
+            </a:gs>
+          </a:gsLst>
+          <a:lin ang="5400000" scaled="0"/>
+        </a:gradFill>
+      </a:fillStyleLst>
+      <a:lnStyleLst>
+        <a:ln w="12700" cap="flat" cmpd="sng" algn="ctr">
+          <a:solidFill>
+            <a:schemeClr val="phClr"/>
+          </a:solidFill>
+          <a:prstDash val="solid"/>
+          <a:miter lim="800000"/>
+        </a:ln>
+        <a:ln w="19050" cap="flat" cmpd="sng" algn="ctr">
+          <a:solidFill>
+            <a:schemeClr val="phClr"/>
+          </a:solidFill>
+          <a:prstDash val="solid"/>
+          <a:miter lim="800000"/>
+        </a:ln>
+        <a:ln w="25400" cap="flat" cmpd="sng" algn="ctr">
+          <a:solidFill>
+            <a:schemeClr val="phClr"/>
+          </a:solidFill>
+          <a:prstDash val="solid"/>
+          <a:miter lim="800000"/>
+        </a:ln>
+      </a:lnStyleLst>
+      <a:effectStyleLst>
+        <a:effectStyle>
+          <a:effectLst/>
+        </a:effectStyle>
+        <a:effectStyle>
+          <a:effectLst/>
+        </a:effectStyle>
+        <a:effectStyle>
+          <a:effectLst>
+            <a:outerShdw blurRad="57150" dist="19050" dir="5400000" algn="ctr" rotWithShape="0">
+              <a:srgbClr val="000000">
+                <a:alpha val="63000"/>
+              </a:srgbClr>
+            </a:outerShdw>
+          </a:effectLst>
+        </a:effectStyle>
+      </a:effectStyleLst>
+      <a:bgFillStyleLst>
+        <a:solidFill>
+          <a:schemeClr val="phClr"/>
+        </a:solidFill>
+        <a:solidFill>
+          <a:schemeClr val="phClr">
+            <a:tint val="95000"/>
+            <a:satMod val="170000"/>
+          </a:schemeClr>
+        </a:solidFill>
+        <a:gradFill rotWithShape="1">
+          <a:gsLst>
+            <a:gs pos="0">
+              <a:schemeClr val="phClr">
+                <a:tint val="93000"/>
+                <a:satMod val="150000"/>
+                <a:shade val="98000"/>
+                <a:lumMod val="102000"/>
+              </a:schemeClr>
+            </a:gs>
+            <a:gs pos="50000">
+              <a:schemeClr val="phClr">
+                <a:tint val="98000"/>
+                <a:satMod val="130000"/>
+                <a:shade val="90000"/>
+                <a:lumMod val="103000"/>
+              </a:schemeClr>
+            </a:gs>
+            <a:gs pos="100000">
+              <a:schemeClr val="phClr">
+                <a:shade val="63000"/>
+                <a:satMod val="120000"/>
+              </a:schemeClr>
+            </a:gs>
+          </a:gsLst>
+          <a:lin ang="5400000" scaled="0"/>
+        </a:gradFill>
+      </a:bgFillStyleLst>
+    </a:fmtScheme>
+  </a:themeElements>
+  <a:objectDefaults>
+    <a:lnDef>
+      <a:spPr/>
+      <a:bodyPr/>
+      <a:lstStyle/>
+      <a:style>
+        <a:lnRef idx="2">
+          <a:schemeClr val="accent1"/>
+        </a:lnRef>
+        <a:fillRef idx="0">
+          <a:schemeClr val="accent1"/>
+        </a:fillRef>
+        <a:effectRef idx="1">
+          <a:schemeClr val="accent1"/>
+        </a:effectRef>
+        <a:fontRef idx="minor">
+          <a:schemeClr val="tx1"/>
+        </a:fontRef>
+      </a:style>
+    </a:lnDef>
+  </a:objectDefaults>
+  <a:extraClrSchemeLst/>
+  <a:extLst>
+    <a:ext uri="{05A4C25C-085E-4340-85A3-A5531E510DB2}">
+      <thm15:themeFamily xmlns:thm15="http://schemas.microsoft.com/office/thememl/2012/main" name="Office Theme" id="{2E142A2C-CD16-42D6-873A-C26D2A0506FA}" vid="{1BDDFF52-6CD6-40A5-AB3C-68EB2F1E4D0A}"/>
+    </a:ext>
+  </a:extLst>
+</a:theme>
 </file>